--- a/BIS/UNet_Archioitecture.pptx
+++ b/BIS/UNet_Archioitecture.pptx
@@ -14,6 +14,7 @@
     <p:sldId id="263" r:id="rId8"/>
     <p:sldId id="262" r:id="rId9"/>
     <p:sldId id="264" r:id="rId10"/>
+    <p:sldId id="265" r:id="rId11"/>
   </p:sldIdLst>
   <p:sldSz cx="12192000" cy="6858000"/>
   <p:notesSz cx="6858000" cy="9144000"/>
@@ -267,7 +268,7 @@
           <a:p>
             <a:fld id="{0EDE9136-241A-477F-BD23-FE1E73726678}" type="datetimeFigureOut">
               <a:rPr lang="en-US" smtClean="0"/>
-              <a:t>9/4/2025</a:t>
+              <a:t>9/8/2025</a:t>
             </a:fld>
             <a:endParaRPr lang="en-US"/>
           </a:p>
@@ -465,7 +466,7 @@
           <a:p>
             <a:fld id="{0EDE9136-241A-477F-BD23-FE1E73726678}" type="datetimeFigureOut">
               <a:rPr lang="en-US" smtClean="0"/>
-              <a:t>9/4/2025</a:t>
+              <a:t>9/8/2025</a:t>
             </a:fld>
             <a:endParaRPr lang="en-US"/>
           </a:p>
@@ -673,7 +674,7 @@
           <a:p>
             <a:fld id="{0EDE9136-241A-477F-BD23-FE1E73726678}" type="datetimeFigureOut">
               <a:rPr lang="en-US" smtClean="0"/>
-              <a:t>9/4/2025</a:t>
+              <a:t>9/8/2025</a:t>
             </a:fld>
             <a:endParaRPr lang="en-US"/>
           </a:p>
@@ -871,7 +872,7 @@
           <a:p>
             <a:fld id="{0EDE9136-241A-477F-BD23-FE1E73726678}" type="datetimeFigureOut">
               <a:rPr lang="en-US" smtClean="0"/>
-              <a:t>9/4/2025</a:t>
+              <a:t>9/8/2025</a:t>
             </a:fld>
             <a:endParaRPr lang="en-US"/>
           </a:p>
@@ -1146,7 +1147,7 @@
           <a:p>
             <a:fld id="{0EDE9136-241A-477F-BD23-FE1E73726678}" type="datetimeFigureOut">
               <a:rPr lang="en-US" smtClean="0"/>
-              <a:t>9/4/2025</a:t>
+              <a:t>9/8/2025</a:t>
             </a:fld>
             <a:endParaRPr lang="en-US"/>
           </a:p>
@@ -1411,7 +1412,7 @@
           <a:p>
             <a:fld id="{0EDE9136-241A-477F-BD23-FE1E73726678}" type="datetimeFigureOut">
               <a:rPr lang="en-US" smtClean="0"/>
-              <a:t>9/4/2025</a:t>
+              <a:t>9/8/2025</a:t>
             </a:fld>
             <a:endParaRPr lang="en-US"/>
           </a:p>
@@ -1823,7 +1824,7 @@
           <a:p>
             <a:fld id="{0EDE9136-241A-477F-BD23-FE1E73726678}" type="datetimeFigureOut">
               <a:rPr lang="en-US" smtClean="0"/>
-              <a:t>9/4/2025</a:t>
+              <a:t>9/8/2025</a:t>
             </a:fld>
             <a:endParaRPr lang="en-US"/>
           </a:p>
@@ -1964,7 +1965,7 @@
           <a:p>
             <a:fld id="{0EDE9136-241A-477F-BD23-FE1E73726678}" type="datetimeFigureOut">
               <a:rPr lang="en-US" smtClean="0"/>
-              <a:t>9/4/2025</a:t>
+              <a:t>9/8/2025</a:t>
             </a:fld>
             <a:endParaRPr lang="en-US"/>
           </a:p>
@@ -2077,7 +2078,7 @@
           <a:p>
             <a:fld id="{0EDE9136-241A-477F-BD23-FE1E73726678}" type="datetimeFigureOut">
               <a:rPr lang="en-US" smtClean="0"/>
-              <a:t>9/4/2025</a:t>
+              <a:t>9/8/2025</a:t>
             </a:fld>
             <a:endParaRPr lang="en-US"/>
           </a:p>
@@ -2388,7 +2389,7 @@
           <a:p>
             <a:fld id="{0EDE9136-241A-477F-BD23-FE1E73726678}" type="datetimeFigureOut">
               <a:rPr lang="en-US" smtClean="0"/>
-              <a:t>9/4/2025</a:t>
+              <a:t>9/8/2025</a:t>
             </a:fld>
             <a:endParaRPr lang="en-US"/>
           </a:p>
@@ -2676,7 +2677,7 @@
           <a:p>
             <a:fld id="{0EDE9136-241A-477F-BD23-FE1E73726678}" type="datetimeFigureOut">
               <a:rPr lang="en-US" smtClean="0"/>
-              <a:t>9/4/2025</a:t>
+              <a:t>9/8/2025</a:t>
             </a:fld>
             <a:endParaRPr lang="en-US"/>
           </a:p>
@@ -2917,7 +2918,7 @@
           <a:p>
             <a:fld id="{0EDE9136-241A-477F-BD23-FE1E73726678}" type="datetimeFigureOut">
               <a:rPr lang="en-US" smtClean="0"/>
-              <a:t>9/4/2025</a:t>
+              <a:t>9/8/2025</a:t>
             </a:fld>
             <a:endParaRPr lang="en-US"/>
           </a:p>
@@ -3420,6 +3421,1129 @@
     <p:extLst>
       <p:ext uri="{BB962C8B-B14F-4D97-AF65-F5344CB8AC3E}">
         <p14:creationId xmlns:p14="http://schemas.microsoft.com/office/powerpoint/2010/main" val="4028033"/>
+      </p:ext>
+    </p:extLst>
+  </p:cSld>
+  <p:clrMapOvr>
+    <a:masterClrMapping/>
+  </p:clrMapOvr>
+</p:sld>
+</file>
+
+<file path=ppt/slides/slide10.xml><?xml version="1.0" encoding="utf-8"?>
+<p:sld xmlns:a="http://schemas.openxmlformats.org/drawingml/2006/main" xmlns:r="http://schemas.openxmlformats.org/officeDocument/2006/relationships" xmlns:p="http://schemas.openxmlformats.org/presentationml/2006/main">
+  <p:cSld>
+    <p:spTree>
+      <p:nvGrpSpPr>
+        <p:cNvPr id="1" name=""/>
+        <p:cNvGrpSpPr/>
+        <p:nvPr/>
+      </p:nvGrpSpPr>
+      <p:grpSpPr>
+        <a:xfrm>
+          <a:off x="0" y="0"/>
+          <a:ext cx="0" cy="0"/>
+          <a:chOff x="0" y="0"/>
+          <a:chExt cx="0" cy="0"/>
+        </a:xfrm>
+      </p:grpSpPr>
+      <p:sp>
+        <p:nvSpPr>
+          <p:cNvPr id="2" name="Title 1">
+            <a:extLst>
+              <a:ext uri="{FF2B5EF4-FFF2-40B4-BE49-F238E27FC236}">
+                <a16:creationId xmlns:a16="http://schemas.microsoft.com/office/drawing/2014/main" id="{5A261C2C-9C98-D39E-AE6A-ACBE8E59C27D}"/>
+              </a:ext>
+            </a:extLst>
+          </p:cNvPr>
+          <p:cNvSpPr>
+            <a:spLocks noGrp="1"/>
+          </p:cNvSpPr>
+          <p:nvPr>
+            <p:ph type="title"/>
+          </p:nvPr>
+        </p:nvSpPr>
+        <p:spPr>
+          <a:xfrm>
+            <a:off x="349623" y="176867"/>
+            <a:ext cx="11631705" cy="562722"/>
+          </a:xfrm>
+          <a:custGeom>
+            <a:avLst/>
+            <a:gdLst>
+              <a:gd name="connsiteX0" fmla="*/ 0 w 11631705"/>
+              <a:gd name="connsiteY0" fmla="*/ 0 h 562722"/>
+              <a:gd name="connsiteX1" fmla="*/ 814219 w 11631705"/>
+              <a:gd name="connsiteY1" fmla="*/ 0 h 562722"/>
+              <a:gd name="connsiteX2" fmla="*/ 1512122 w 11631705"/>
+              <a:gd name="connsiteY2" fmla="*/ 0 h 562722"/>
+              <a:gd name="connsiteX3" fmla="*/ 1744756 w 11631705"/>
+              <a:gd name="connsiteY3" fmla="*/ 0 h 562722"/>
+              <a:gd name="connsiteX4" fmla="*/ 2558975 w 11631705"/>
+              <a:gd name="connsiteY4" fmla="*/ 0 h 562722"/>
+              <a:gd name="connsiteX5" fmla="*/ 3024243 w 11631705"/>
+              <a:gd name="connsiteY5" fmla="*/ 0 h 562722"/>
+              <a:gd name="connsiteX6" fmla="*/ 3722146 w 11631705"/>
+              <a:gd name="connsiteY6" fmla="*/ 0 h 562722"/>
+              <a:gd name="connsiteX7" fmla="*/ 4303731 w 11631705"/>
+              <a:gd name="connsiteY7" fmla="*/ 0 h 562722"/>
+              <a:gd name="connsiteX8" fmla="*/ 4652682 w 11631705"/>
+              <a:gd name="connsiteY8" fmla="*/ 0 h 562722"/>
+              <a:gd name="connsiteX9" fmla="*/ 4885316 w 11631705"/>
+              <a:gd name="connsiteY9" fmla="*/ 0 h 562722"/>
+              <a:gd name="connsiteX10" fmla="*/ 5234267 w 11631705"/>
+              <a:gd name="connsiteY10" fmla="*/ 0 h 562722"/>
+              <a:gd name="connsiteX11" fmla="*/ 5932170 w 11631705"/>
+              <a:gd name="connsiteY11" fmla="*/ 0 h 562722"/>
+              <a:gd name="connsiteX12" fmla="*/ 6630072 w 11631705"/>
+              <a:gd name="connsiteY12" fmla="*/ 0 h 562722"/>
+              <a:gd name="connsiteX13" fmla="*/ 7095340 w 11631705"/>
+              <a:gd name="connsiteY13" fmla="*/ 0 h 562722"/>
+              <a:gd name="connsiteX14" fmla="*/ 7560608 w 11631705"/>
+              <a:gd name="connsiteY14" fmla="*/ 0 h 562722"/>
+              <a:gd name="connsiteX15" fmla="*/ 7909559 w 11631705"/>
+              <a:gd name="connsiteY15" fmla="*/ 0 h 562722"/>
+              <a:gd name="connsiteX16" fmla="*/ 8607462 w 11631705"/>
+              <a:gd name="connsiteY16" fmla="*/ 0 h 562722"/>
+              <a:gd name="connsiteX17" fmla="*/ 9189047 w 11631705"/>
+              <a:gd name="connsiteY17" fmla="*/ 0 h 562722"/>
+              <a:gd name="connsiteX18" fmla="*/ 9886949 w 11631705"/>
+              <a:gd name="connsiteY18" fmla="*/ 0 h 562722"/>
+              <a:gd name="connsiteX19" fmla="*/ 10352217 w 11631705"/>
+              <a:gd name="connsiteY19" fmla="*/ 0 h 562722"/>
+              <a:gd name="connsiteX20" fmla="*/ 10933803 w 11631705"/>
+              <a:gd name="connsiteY20" fmla="*/ 0 h 562722"/>
+              <a:gd name="connsiteX21" fmla="*/ 11631705 w 11631705"/>
+              <a:gd name="connsiteY21" fmla="*/ 0 h 562722"/>
+              <a:gd name="connsiteX22" fmla="*/ 11631705 w 11631705"/>
+              <a:gd name="connsiteY22" fmla="*/ 562722 h 562722"/>
+              <a:gd name="connsiteX23" fmla="*/ 11399071 w 11631705"/>
+              <a:gd name="connsiteY23" fmla="*/ 562722 h 562722"/>
+              <a:gd name="connsiteX24" fmla="*/ 11050120 w 11631705"/>
+              <a:gd name="connsiteY24" fmla="*/ 562722 h 562722"/>
+              <a:gd name="connsiteX25" fmla="*/ 10352217 w 11631705"/>
+              <a:gd name="connsiteY25" fmla="*/ 562722 h 562722"/>
+              <a:gd name="connsiteX26" fmla="*/ 10119583 w 11631705"/>
+              <a:gd name="connsiteY26" fmla="*/ 562722 h 562722"/>
+              <a:gd name="connsiteX27" fmla="*/ 9421681 w 11631705"/>
+              <a:gd name="connsiteY27" fmla="*/ 562722 h 562722"/>
+              <a:gd name="connsiteX28" fmla="*/ 9189047 w 11631705"/>
+              <a:gd name="connsiteY28" fmla="*/ 562722 h 562722"/>
+              <a:gd name="connsiteX29" fmla="*/ 8840096 w 11631705"/>
+              <a:gd name="connsiteY29" fmla="*/ 562722 h 562722"/>
+              <a:gd name="connsiteX30" fmla="*/ 8374828 w 11631705"/>
+              <a:gd name="connsiteY30" fmla="*/ 562722 h 562722"/>
+              <a:gd name="connsiteX31" fmla="*/ 7560608 w 11631705"/>
+              <a:gd name="connsiteY31" fmla="*/ 562722 h 562722"/>
+              <a:gd name="connsiteX32" fmla="*/ 7327974 w 11631705"/>
+              <a:gd name="connsiteY32" fmla="*/ 562722 h 562722"/>
+              <a:gd name="connsiteX33" fmla="*/ 6513755 w 11631705"/>
+              <a:gd name="connsiteY33" fmla="*/ 562722 h 562722"/>
+              <a:gd name="connsiteX34" fmla="*/ 6281121 w 11631705"/>
+              <a:gd name="connsiteY34" fmla="*/ 562722 h 562722"/>
+              <a:gd name="connsiteX35" fmla="*/ 5932170 w 11631705"/>
+              <a:gd name="connsiteY35" fmla="*/ 562722 h 562722"/>
+              <a:gd name="connsiteX36" fmla="*/ 5583218 w 11631705"/>
+              <a:gd name="connsiteY36" fmla="*/ 562722 h 562722"/>
+              <a:gd name="connsiteX37" fmla="*/ 5350584 w 11631705"/>
+              <a:gd name="connsiteY37" fmla="*/ 562722 h 562722"/>
+              <a:gd name="connsiteX38" fmla="*/ 5001633 w 11631705"/>
+              <a:gd name="connsiteY38" fmla="*/ 562722 h 562722"/>
+              <a:gd name="connsiteX39" fmla="*/ 4187414 w 11631705"/>
+              <a:gd name="connsiteY39" fmla="*/ 562722 h 562722"/>
+              <a:gd name="connsiteX40" fmla="*/ 3954780 w 11631705"/>
+              <a:gd name="connsiteY40" fmla="*/ 562722 h 562722"/>
+              <a:gd name="connsiteX41" fmla="*/ 3489511 w 11631705"/>
+              <a:gd name="connsiteY41" fmla="*/ 562722 h 562722"/>
+              <a:gd name="connsiteX42" fmla="*/ 3140560 w 11631705"/>
+              <a:gd name="connsiteY42" fmla="*/ 562722 h 562722"/>
+              <a:gd name="connsiteX43" fmla="*/ 2442658 w 11631705"/>
+              <a:gd name="connsiteY43" fmla="*/ 562722 h 562722"/>
+              <a:gd name="connsiteX44" fmla="*/ 1628439 w 11631705"/>
+              <a:gd name="connsiteY44" fmla="*/ 562722 h 562722"/>
+              <a:gd name="connsiteX45" fmla="*/ 1279488 w 11631705"/>
+              <a:gd name="connsiteY45" fmla="*/ 562722 h 562722"/>
+              <a:gd name="connsiteX46" fmla="*/ 930536 w 11631705"/>
+              <a:gd name="connsiteY46" fmla="*/ 562722 h 562722"/>
+              <a:gd name="connsiteX47" fmla="*/ 0 w 11631705"/>
+              <a:gd name="connsiteY47" fmla="*/ 562722 h 562722"/>
+              <a:gd name="connsiteX48" fmla="*/ 0 w 11631705"/>
+              <a:gd name="connsiteY48" fmla="*/ 0 h 562722"/>
+            </a:gdLst>
+            <a:ahLst/>
+            <a:cxnLst>
+              <a:cxn ang="0">
+                <a:pos x="connsiteX0" y="connsiteY0"/>
+              </a:cxn>
+              <a:cxn ang="0">
+                <a:pos x="connsiteX1" y="connsiteY1"/>
+              </a:cxn>
+              <a:cxn ang="0">
+                <a:pos x="connsiteX2" y="connsiteY2"/>
+              </a:cxn>
+              <a:cxn ang="0">
+                <a:pos x="connsiteX3" y="connsiteY3"/>
+              </a:cxn>
+              <a:cxn ang="0">
+                <a:pos x="connsiteX4" y="connsiteY4"/>
+              </a:cxn>
+              <a:cxn ang="0">
+                <a:pos x="connsiteX5" y="connsiteY5"/>
+              </a:cxn>
+              <a:cxn ang="0">
+                <a:pos x="connsiteX6" y="connsiteY6"/>
+              </a:cxn>
+              <a:cxn ang="0">
+                <a:pos x="connsiteX7" y="connsiteY7"/>
+              </a:cxn>
+              <a:cxn ang="0">
+                <a:pos x="connsiteX8" y="connsiteY8"/>
+              </a:cxn>
+              <a:cxn ang="0">
+                <a:pos x="connsiteX9" y="connsiteY9"/>
+              </a:cxn>
+              <a:cxn ang="0">
+                <a:pos x="connsiteX10" y="connsiteY10"/>
+              </a:cxn>
+              <a:cxn ang="0">
+                <a:pos x="connsiteX11" y="connsiteY11"/>
+              </a:cxn>
+              <a:cxn ang="0">
+                <a:pos x="connsiteX12" y="connsiteY12"/>
+              </a:cxn>
+              <a:cxn ang="0">
+                <a:pos x="connsiteX13" y="connsiteY13"/>
+              </a:cxn>
+              <a:cxn ang="0">
+                <a:pos x="connsiteX14" y="connsiteY14"/>
+              </a:cxn>
+              <a:cxn ang="0">
+                <a:pos x="connsiteX15" y="connsiteY15"/>
+              </a:cxn>
+              <a:cxn ang="0">
+                <a:pos x="connsiteX16" y="connsiteY16"/>
+              </a:cxn>
+              <a:cxn ang="0">
+                <a:pos x="connsiteX17" y="connsiteY17"/>
+              </a:cxn>
+              <a:cxn ang="0">
+                <a:pos x="connsiteX18" y="connsiteY18"/>
+              </a:cxn>
+              <a:cxn ang="0">
+                <a:pos x="connsiteX19" y="connsiteY19"/>
+              </a:cxn>
+              <a:cxn ang="0">
+                <a:pos x="connsiteX20" y="connsiteY20"/>
+              </a:cxn>
+              <a:cxn ang="0">
+                <a:pos x="connsiteX21" y="connsiteY21"/>
+              </a:cxn>
+              <a:cxn ang="0">
+                <a:pos x="connsiteX22" y="connsiteY22"/>
+              </a:cxn>
+              <a:cxn ang="0">
+                <a:pos x="connsiteX23" y="connsiteY23"/>
+              </a:cxn>
+              <a:cxn ang="0">
+                <a:pos x="connsiteX24" y="connsiteY24"/>
+              </a:cxn>
+              <a:cxn ang="0">
+                <a:pos x="connsiteX25" y="connsiteY25"/>
+              </a:cxn>
+              <a:cxn ang="0">
+                <a:pos x="connsiteX26" y="connsiteY26"/>
+              </a:cxn>
+              <a:cxn ang="0">
+                <a:pos x="connsiteX27" y="connsiteY27"/>
+              </a:cxn>
+              <a:cxn ang="0">
+                <a:pos x="connsiteX28" y="connsiteY28"/>
+              </a:cxn>
+              <a:cxn ang="0">
+                <a:pos x="connsiteX29" y="connsiteY29"/>
+              </a:cxn>
+              <a:cxn ang="0">
+                <a:pos x="connsiteX30" y="connsiteY30"/>
+              </a:cxn>
+              <a:cxn ang="0">
+                <a:pos x="connsiteX31" y="connsiteY31"/>
+              </a:cxn>
+              <a:cxn ang="0">
+                <a:pos x="connsiteX32" y="connsiteY32"/>
+              </a:cxn>
+              <a:cxn ang="0">
+                <a:pos x="connsiteX33" y="connsiteY33"/>
+              </a:cxn>
+              <a:cxn ang="0">
+                <a:pos x="connsiteX34" y="connsiteY34"/>
+              </a:cxn>
+              <a:cxn ang="0">
+                <a:pos x="connsiteX35" y="connsiteY35"/>
+              </a:cxn>
+              <a:cxn ang="0">
+                <a:pos x="connsiteX36" y="connsiteY36"/>
+              </a:cxn>
+              <a:cxn ang="0">
+                <a:pos x="connsiteX37" y="connsiteY37"/>
+              </a:cxn>
+              <a:cxn ang="0">
+                <a:pos x="connsiteX38" y="connsiteY38"/>
+              </a:cxn>
+              <a:cxn ang="0">
+                <a:pos x="connsiteX39" y="connsiteY39"/>
+              </a:cxn>
+              <a:cxn ang="0">
+                <a:pos x="connsiteX40" y="connsiteY40"/>
+              </a:cxn>
+              <a:cxn ang="0">
+                <a:pos x="connsiteX41" y="connsiteY41"/>
+              </a:cxn>
+              <a:cxn ang="0">
+                <a:pos x="connsiteX42" y="connsiteY42"/>
+              </a:cxn>
+              <a:cxn ang="0">
+                <a:pos x="connsiteX43" y="connsiteY43"/>
+              </a:cxn>
+              <a:cxn ang="0">
+                <a:pos x="connsiteX44" y="connsiteY44"/>
+              </a:cxn>
+              <a:cxn ang="0">
+                <a:pos x="connsiteX45" y="connsiteY45"/>
+              </a:cxn>
+              <a:cxn ang="0">
+                <a:pos x="connsiteX46" y="connsiteY46"/>
+              </a:cxn>
+              <a:cxn ang="0">
+                <a:pos x="connsiteX47" y="connsiteY47"/>
+              </a:cxn>
+              <a:cxn ang="0">
+                <a:pos x="connsiteX48" y="connsiteY48"/>
+              </a:cxn>
+            </a:cxnLst>
+            <a:rect l="l" t="t" r="r" b="b"/>
+            <a:pathLst>
+              <a:path w="11631705" h="562722" fill="none" extrusionOk="0">
+                <a:moveTo>
+                  <a:pt x="0" y="0"/>
+                </a:moveTo>
+                <a:cubicBezTo>
+                  <a:pt x="342086" y="-4203"/>
+                  <a:pt x="635873" y="37113"/>
+                  <a:pt x="814219" y="0"/>
+                </a:cubicBezTo>
+                <a:cubicBezTo>
+                  <a:pt x="992565" y="-37113"/>
+                  <a:pt x="1359352" y="64161"/>
+                  <a:pt x="1512122" y="0"/>
+                </a:cubicBezTo>
+                <a:cubicBezTo>
+                  <a:pt x="1664892" y="-64161"/>
+                  <a:pt x="1630497" y="21483"/>
+                  <a:pt x="1744756" y="0"/>
+                </a:cubicBezTo>
+                <a:cubicBezTo>
+                  <a:pt x="1859015" y="-21483"/>
+                  <a:pt x="2318765" y="62723"/>
+                  <a:pt x="2558975" y="0"/>
+                </a:cubicBezTo>
+                <a:cubicBezTo>
+                  <a:pt x="2799185" y="-62723"/>
+                  <a:pt x="2898620" y="16032"/>
+                  <a:pt x="3024243" y="0"/>
+                </a:cubicBezTo>
+                <a:cubicBezTo>
+                  <a:pt x="3149866" y="-16032"/>
+                  <a:pt x="3533187" y="13931"/>
+                  <a:pt x="3722146" y="0"/>
+                </a:cubicBezTo>
+                <a:cubicBezTo>
+                  <a:pt x="3911105" y="-13931"/>
+                  <a:pt x="4038964" y="4992"/>
+                  <a:pt x="4303731" y="0"/>
+                </a:cubicBezTo>
+                <a:cubicBezTo>
+                  <a:pt x="4568499" y="-4992"/>
+                  <a:pt x="4576577" y="39544"/>
+                  <a:pt x="4652682" y="0"/>
+                </a:cubicBezTo>
+                <a:cubicBezTo>
+                  <a:pt x="4728787" y="-39544"/>
+                  <a:pt x="4819107" y="4404"/>
+                  <a:pt x="4885316" y="0"/>
+                </a:cubicBezTo>
+                <a:cubicBezTo>
+                  <a:pt x="4951525" y="-4404"/>
+                  <a:pt x="5137175" y="18197"/>
+                  <a:pt x="5234267" y="0"/>
+                </a:cubicBezTo>
+                <a:cubicBezTo>
+                  <a:pt x="5331359" y="-18197"/>
+                  <a:pt x="5783641" y="25792"/>
+                  <a:pt x="5932170" y="0"/>
+                </a:cubicBezTo>
+                <a:cubicBezTo>
+                  <a:pt x="6080699" y="-25792"/>
+                  <a:pt x="6333854" y="31411"/>
+                  <a:pt x="6630072" y="0"/>
+                </a:cubicBezTo>
+                <a:cubicBezTo>
+                  <a:pt x="6926290" y="-31411"/>
+                  <a:pt x="6886189" y="32544"/>
+                  <a:pt x="7095340" y="0"/>
+                </a:cubicBezTo>
+                <a:cubicBezTo>
+                  <a:pt x="7304491" y="-32544"/>
+                  <a:pt x="7357842" y="47968"/>
+                  <a:pt x="7560608" y="0"/>
+                </a:cubicBezTo>
+                <a:cubicBezTo>
+                  <a:pt x="7763374" y="-47968"/>
+                  <a:pt x="7748562" y="23196"/>
+                  <a:pt x="7909559" y="0"/>
+                </a:cubicBezTo>
+                <a:cubicBezTo>
+                  <a:pt x="8070556" y="-23196"/>
+                  <a:pt x="8310833" y="79200"/>
+                  <a:pt x="8607462" y="0"/>
+                </a:cubicBezTo>
+                <a:cubicBezTo>
+                  <a:pt x="8904091" y="-79200"/>
+                  <a:pt x="8957160" y="68528"/>
+                  <a:pt x="9189047" y="0"/>
+                </a:cubicBezTo>
+                <a:cubicBezTo>
+                  <a:pt x="9420934" y="-68528"/>
+                  <a:pt x="9666297" y="64375"/>
+                  <a:pt x="9886949" y="0"/>
+                </a:cubicBezTo>
+                <a:cubicBezTo>
+                  <a:pt x="10107601" y="-64375"/>
+                  <a:pt x="10218665" y="11784"/>
+                  <a:pt x="10352217" y="0"/>
+                </a:cubicBezTo>
+                <a:cubicBezTo>
+                  <a:pt x="10485769" y="-11784"/>
+                  <a:pt x="10796603" y="62475"/>
+                  <a:pt x="10933803" y="0"/>
+                </a:cubicBezTo>
+                <a:cubicBezTo>
+                  <a:pt x="11071003" y="-62475"/>
+                  <a:pt x="11325132" y="27561"/>
+                  <a:pt x="11631705" y="0"/>
+                </a:cubicBezTo>
+                <a:cubicBezTo>
+                  <a:pt x="11663920" y="145010"/>
+                  <a:pt x="11587264" y="386516"/>
+                  <a:pt x="11631705" y="562722"/>
+                </a:cubicBezTo>
+                <a:cubicBezTo>
+                  <a:pt x="11569325" y="571870"/>
+                  <a:pt x="11472062" y="535634"/>
+                  <a:pt x="11399071" y="562722"/>
+                </a:cubicBezTo>
+                <a:cubicBezTo>
+                  <a:pt x="11326080" y="589810"/>
+                  <a:pt x="11223782" y="543724"/>
+                  <a:pt x="11050120" y="562722"/>
+                </a:cubicBezTo>
+                <a:cubicBezTo>
+                  <a:pt x="10876458" y="581720"/>
+                  <a:pt x="10642248" y="540076"/>
+                  <a:pt x="10352217" y="562722"/>
+                </a:cubicBezTo>
+                <a:cubicBezTo>
+                  <a:pt x="10062186" y="585368"/>
+                  <a:pt x="10232427" y="557940"/>
+                  <a:pt x="10119583" y="562722"/>
+                </a:cubicBezTo>
+                <a:cubicBezTo>
+                  <a:pt x="10006739" y="567504"/>
+                  <a:pt x="9601099" y="536111"/>
+                  <a:pt x="9421681" y="562722"/>
+                </a:cubicBezTo>
+                <a:cubicBezTo>
+                  <a:pt x="9242263" y="589333"/>
+                  <a:pt x="9237267" y="545215"/>
+                  <a:pt x="9189047" y="562722"/>
+                </a:cubicBezTo>
+                <a:cubicBezTo>
+                  <a:pt x="9140827" y="580229"/>
+                  <a:pt x="8962077" y="524613"/>
+                  <a:pt x="8840096" y="562722"/>
+                </a:cubicBezTo>
+                <a:cubicBezTo>
+                  <a:pt x="8718115" y="600831"/>
+                  <a:pt x="8571101" y="508174"/>
+                  <a:pt x="8374828" y="562722"/>
+                </a:cubicBezTo>
+                <a:cubicBezTo>
+                  <a:pt x="8178555" y="617270"/>
+                  <a:pt x="7950108" y="507197"/>
+                  <a:pt x="7560608" y="562722"/>
+                </a:cubicBezTo>
+                <a:cubicBezTo>
+                  <a:pt x="7171108" y="618247"/>
+                  <a:pt x="7389852" y="546843"/>
+                  <a:pt x="7327974" y="562722"/>
+                </a:cubicBezTo>
+                <a:cubicBezTo>
+                  <a:pt x="7266096" y="578601"/>
+                  <a:pt x="6689702" y="489209"/>
+                  <a:pt x="6513755" y="562722"/>
+                </a:cubicBezTo>
+                <a:cubicBezTo>
+                  <a:pt x="6337808" y="636235"/>
+                  <a:pt x="6337700" y="560835"/>
+                  <a:pt x="6281121" y="562722"/>
+                </a:cubicBezTo>
+                <a:cubicBezTo>
+                  <a:pt x="6224542" y="564609"/>
+                  <a:pt x="6008924" y="553383"/>
+                  <a:pt x="5932170" y="562722"/>
+                </a:cubicBezTo>
+                <a:cubicBezTo>
+                  <a:pt x="5855416" y="572061"/>
+                  <a:pt x="5674889" y="558977"/>
+                  <a:pt x="5583218" y="562722"/>
+                </a:cubicBezTo>
+                <a:cubicBezTo>
+                  <a:pt x="5491547" y="566467"/>
+                  <a:pt x="5409706" y="542834"/>
+                  <a:pt x="5350584" y="562722"/>
+                </a:cubicBezTo>
+                <a:cubicBezTo>
+                  <a:pt x="5291462" y="582610"/>
+                  <a:pt x="5145485" y="554054"/>
+                  <a:pt x="5001633" y="562722"/>
+                </a:cubicBezTo>
+                <a:cubicBezTo>
+                  <a:pt x="4857781" y="571390"/>
+                  <a:pt x="4543111" y="524575"/>
+                  <a:pt x="4187414" y="562722"/>
+                </a:cubicBezTo>
+                <a:cubicBezTo>
+                  <a:pt x="3831717" y="600869"/>
+                  <a:pt x="4033408" y="546040"/>
+                  <a:pt x="3954780" y="562722"/>
+                </a:cubicBezTo>
+                <a:cubicBezTo>
+                  <a:pt x="3876152" y="579404"/>
+                  <a:pt x="3680730" y="527035"/>
+                  <a:pt x="3489511" y="562722"/>
+                </a:cubicBezTo>
+                <a:cubicBezTo>
+                  <a:pt x="3298292" y="598409"/>
+                  <a:pt x="3255155" y="556533"/>
+                  <a:pt x="3140560" y="562722"/>
+                </a:cubicBezTo>
+                <a:cubicBezTo>
+                  <a:pt x="3025965" y="568911"/>
+                  <a:pt x="2625160" y="528749"/>
+                  <a:pt x="2442658" y="562722"/>
+                </a:cubicBezTo>
+                <a:cubicBezTo>
+                  <a:pt x="2260156" y="596695"/>
+                  <a:pt x="1805475" y="560183"/>
+                  <a:pt x="1628439" y="562722"/>
+                </a:cubicBezTo>
+                <a:cubicBezTo>
+                  <a:pt x="1451403" y="565261"/>
+                  <a:pt x="1395182" y="557052"/>
+                  <a:pt x="1279488" y="562722"/>
+                </a:cubicBezTo>
+                <a:cubicBezTo>
+                  <a:pt x="1163794" y="568392"/>
+                  <a:pt x="1022253" y="532207"/>
+                  <a:pt x="930536" y="562722"/>
+                </a:cubicBezTo>
+                <a:cubicBezTo>
+                  <a:pt x="838819" y="593237"/>
+                  <a:pt x="378118" y="529087"/>
+                  <a:pt x="0" y="562722"/>
+                </a:cubicBezTo>
+                <a:cubicBezTo>
+                  <a:pt x="-27815" y="424413"/>
+                  <a:pt x="60016" y="214859"/>
+                  <a:pt x="0" y="0"/>
+                </a:cubicBezTo>
+                <a:close/>
+              </a:path>
+              <a:path w="11631705" h="562722" stroke="0" extrusionOk="0">
+                <a:moveTo>
+                  <a:pt x="0" y="0"/>
+                </a:moveTo>
+                <a:cubicBezTo>
+                  <a:pt x="338202" y="-29655"/>
+                  <a:pt x="424489" y="71660"/>
+                  <a:pt x="697902" y="0"/>
+                </a:cubicBezTo>
+                <a:cubicBezTo>
+                  <a:pt x="971315" y="-71660"/>
+                  <a:pt x="1121283" y="19139"/>
+                  <a:pt x="1279488" y="0"/>
+                </a:cubicBezTo>
+                <a:cubicBezTo>
+                  <a:pt x="1437693" y="-19139"/>
+                  <a:pt x="1646587" y="16322"/>
+                  <a:pt x="1744756" y="0"/>
+                </a:cubicBezTo>
+                <a:cubicBezTo>
+                  <a:pt x="1842925" y="-16322"/>
+                  <a:pt x="2137065" y="3873"/>
+                  <a:pt x="2326341" y="0"/>
+                </a:cubicBezTo>
+                <a:cubicBezTo>
+                  <a:pt x="2515617" y="-3873"/>
+                  <a:pt x="2803685" y="60828"/>
+                  <a:pt x="3140560" y="0"/>
+                </a:cubicBezTo>
+                <a:cubicBezTo>
+                  <a:pt x="3477435" y="-60828"/>
+                  <a:pt x="3311138" y="12384"/>
+                  <a:pt x="3373194" y="0"/>
+                </a:cubicBezTo>
+                <a:cubicBezTo>
+                  <a:pt x="3435250" y="-12384"/>
+                  <a:pt x="3727080" y="8383"/>
+                  <a:pt x="3954780" y="0"/>
+                </a:cubicBezTo>
+                <a:cubicBezTo>
+                  <a:pt x="4182480" y="-8383"/>
+                  <a:pt x="4435585" y="25819"/>
+                  <a:pt x="4652682" y="0"/>
+                </a:cubicBezTo>
+                <a:cubicBezTo>
+                  <a:pt x="4869779" y="-25819"/>
+                  <a:pt x="5074668" y="74900"/>
+                  <a:pt x="5350584" y="0"/>
+                </a:cubicBezTo>
+                <a:cubicBezTo>
+                  <a:pt x="5626500" y="-74900"/>
+                  <a:pt x="5598124" y="5771"/>
+                  <a:pt x="5699535" y="0"/>
+                </a:cubicBezTo>
+                <a:cubicBezTo>
+                  <a:pt x="5800946" y="-5771"/>
+                  <a:pt x="6041455" y="47045"/>
+                  <a:pt x="6164804" y="0"/>
+                </a:cubicBezTo>
+                <a:cubicBezTo>
+                  <a:pt x="6288153" y="-47045"/>
+                  <a:pt x="6503880" y="46486"/>
+                  <a:pt x="6630072" y="0"/>
+                </a:cubicBezTo>
+                <a:cubicBezTo>
+                  <a:pt x="6756264" y="-46486"/>
+                  <a:pt x="7112026" y="87394"/>
+                  <a:pt x="7444291" y="0"/>
+                </a:cubicBezTo>
+                <a:cubicBezTo>
+                  <a:pt x="7776556" y="-87394"/>
+                  <a:pt x="7889068" y="86771"/>
+                  <a:pt x="8258511" y="0"/>
+                </a:cubicBezTo>
+                <a:cubicBezTo>
+                  <a:pt x="8627954" y="-86771"/>
+                  <a:pt x="8616548" y="18707"/>
+                  <a:pt x="8840096" y="0"/>
+                </a:cubicBezTo>
+                <a:cubicBezTo>
+                  <a:pt x="9063645" y="-18707"/>
+                  <a:pt x="9027221" y="8966"/>
+                  <a:pt x="9189047" y="0"/>
+                </a:cubicBezTo>
+                <a:cubicBezTo>
+                  <a:pt x="9350873" y="-8966"/>
+                  <a:pt x="9543691" y="48744"/>
+                  <a:pt x="9654315" y="0"/>
+                </a:cubicBezTo>
+                <a:cubicBezTo>
+                  <a:pt x="9764939" y="-48744"/>
+                  <a:pt x="10241859" y="54062"/>
+                  <a:pt x="10468535" y="0"/>
+                </a:cubicBezTo>
+                <a:cubicBezTo>
+                  <a:pt x="10695211" y="-54062"/>
+                  <a:pt x="10650490" y="24969"/>
+                  <a:pt x="10701169" y="0"/>
+                </a:cubicBezTo>
+                <a:cubicBezTo>
+                  <a:pt x="10751848" y="-24969"/>
+                  <a:pt x="11232226" y="62824"/>
+                  <a:pt x="11631705" y="0"/>
+                </a:cubicBezTo>
+                <a:cubicBezTo>
+                  <a:pt x="11686475" y="234546"/>
+                  <a:pt x="11604709" y="350213"/>
+                  <a:pt x="11631705" y="562722"/>
+                </a:cubicBezTo>
+                <a:cubicBezTo>
+                  <a:pt x="11358296" y="583339"/>
+                  <a:pt x="11276373" y="557530"/>
+                  <a:pt x="11050120" y="562722"/>
+                </a:cubicBezTo>
+                <a:cubicBezTo>
+                  <a:pt x="10823867" y="567914"/>
+                  <a:pt x="10690308" y="544323"/>
+                  <a:pt x="10584852" y="562722"/>
+                </a:cubicBezTo>
+                <a:cubicBezTo>
+                  <a:pt x="10479396" y="581121"/>
+                  <a:pt x="10404317" y="546023"/>
+                  <a:pt x="10352217" y="562722"/>
+                </a:cubicBezTo>
+                <a:cubicBezTo>
+                  <a:pt x="10300117" y="579421"/>
+                  <a:pt x="10212429" y="550718"/>
+                  <a:pt x="10119583" y="562722"/>
+                </a:cubicBezTo>
+                <a:cubicBezTo>
+                  <a:pt x="10026737" y="574726"/>
+                  <a:pt x="9529237" y="542895"/>
+                  <a:pt x="9305364" y="562722"/>
+                </a:cubicBezTo>
+                <a:cubicBezTo>
+                  <a:pt x="9081491" y="582549"/>
+                  <a:pt x="8661810" y="560654"/>
+                  <a:pt x="8491145" y="562722"/>
+                </a:cubicBezTo>
+                <a:cubicBezTo>
+                  <a:pt x="8320480" y="564790"/>
+                  <a:pt x="8001633" y="494824"/>
+                  <a:pt x="7793242" y="562722"/>
+                </a:cubicBezTo>
+                <a:cubicBezTo>
+                  <a:pt x="7584851" y="630620"/>
+                  <a:pt x="7608390" y="541385"/>
+                  <a:pt x="7560608" y="562722"/>
+                </a:cubicBezTo>
+                <a:cubicBezTo>
+                  <a:pt x="7512826" y="584059"/>
+                  <a:pt x="7289647" y="529517"/>
+                  <a:pt x="7095340" y="562722"/>
+                </a:cubicBezTo>
+                <a:cubicBezTo>
+                  <a:pt x="6901033" y="595927"/>
+                  <a:pt x="6776430" y="517473"/>
+                  <a:pt x="6513755" y="562722"/>
+                </a:cubicBezTo>
+                <a:cubicBezTo>
+                  <a:pt x="6251080" y="607971"/>
+                  <a:pt x="6297329" y="529201"/>
+                  <a:pt x="6164804" y="562722"/>
+                </a:cubicBezTo>
+                <a:cubicBezTo>
+                  <a:pt x="6032279" y="596243"/>
+                  <a:pt x="6035883" y="541658"/>
+                  <a:pt x="5932170" y="562722"/>
+                </a:cubicBezTo>
+                <a:cubicBezTo>
+                  <a:pt x="5828457" y="583786"/>
+                  <a:pt x="5623134" y="532756"/>
+                  <a:pt x="5466901" y="562722"/>
+                </a:cubicBezTo>
+                <a:cubicBezTo>
+                  <a:pt x="5310668" y="592688"/>
+                  <a:pt x="5047476" y="516204"/>
+                  <a:pt x="4652682" y="562722"/>
+                </a:cubicBezTo>
+                <a:cubicBezTo>
+                  <a:pt x="4257888" y="609240"/>
+                  <a:pt x="4313069" y="519984"/>
+                  <a:pt x="4187414" y="562722"/>
+                </a:cubicBezTo>
+                <a:cubicBezTo>
+                  <a:pt x="4061759" y="605460"/>
+                  <a:pt x="3908481" y="522443"/>
+                  <a:pt x="3838463" y="562722"/>
+                </a:cubicBezTo>
+                <a:cubicBezTo>
+                  <a:pt x="3768445" y="603001"/>
+                  <a:pt x="3293006" y="492541"/>
+                  <a:pt x="3024243" y="562722"/>
+                </a:cubicBezTo>
+                <a:cubicBezTo>
+                  <a:pt x="2755480" y="632903"/>
+                  <a:pt x="2771667" y="533216"/>
+                  <a:pt x="2558975" y="562722"/>
+                </a:cubicBezTo>
+                <a:cubicBezTo>
+                  <a:pt x="2346283" y="592228"/>
+                  <a:pt x="2133414" y="506629"/>
+                  <a:pt x="1861073" y="562722"/>
+                </a:cubicBezTo>
+                <a:cubicBezTo>
+                  <a:pt x="1588732" y="618815"/>
+                  <a:pt x="1742583" y="556831"/>
+                  <a:pt x="1628439" y="562722"/>
+                </a:cubicBezTo>
+                <a:cubicBezTo>
+                  <a:pt x="1514295" y="568613"/>
+                  <a:pt x="1277439" y="558871"/>
+                  <a:pt x="1163170" y="562722"/>
+                </a:cubicBezTo>
+                <a:cubicBezTo>
+                  <a:pt x="1048901" y="566573"/>
+                  <a:pt x="501807" y="521316"/>
+                  <a:pt x="0" y="562722"/>
+                </a:cubicBezTo>
+                <a:cubicBezTo>
+                  <a:pt x="-39413" y="439973"/>
+                  <a:pt x="10327" y="234944"/>
+                  <a:pt x="0" y="0"/>
+                </a:cubicBezTo>
+                <a:close/>
+              </a:path>
+            </a:pathLst>
+          </a:custGeom>
+          <a:ln>
+            <a:solidFill>
+              <a:schemeClr val="tx2">
+                <a:lumMod val="75000"/>
+                <a:lumOff val="25000"/>
+              </a:schemeClr>
+            </a:solidFill>
+            <a:extLst>
+              <a:ext uri="{C807C97D-BFC1-408E-A445-0C87EB9F89A2}">
+                <ask:lineSketchStyleProps xmlns:ask="http://schemas.microsoft.com/office/drawing/2018/sketchyshapes" sd="298134395">
+                  <ask:type>
+                    <ask:lineSketchScribble/>
+                  </ask:type>
+                </ask:lineSketchStyleProps>
+              </a:ext>
+            </a:extLst>
+          </a:ln>
+        </p:spPr>
+        <p:txBody>
+          <a:bodyPr>
+            <a:normAutofit/>
+          </a:bodyPr>
+          <a:lstStyle/>
+          <a:p>
+            <a:r>
+              <a:rPr lang="en-US" sz="1800" dirty="0"/>
+              <a:t>Model Architecture</a:t>
+            </a:r>
+          </a:p>
+        </p:txBody>
+      </p:sp>
+      <p:pic>
+        <p:nvPicPr>
+          <p:cNvPr id="7" name="Picture 6">
+            <a:extLst>
+              <a:ext uri="{FF2B5EF4-FFF2-40B4-BE49-F238E27FC236}">
+                <a16:creationId xmlns:a16="http://schemas.microsoft.com/office/drawing/2014/main" id="{99A3D0BB-7612-6010-B8DA-F97667E33889}"/>
+              </a:ext>
+            </a:extLst>
+          </p:cNvPr>
+          <p:cNvPicPr>
+            <a:picLocks noChangeAspect="1"/>
+          </p:cNvPicPr>
+          <p:nvPr/>
+        </p:nvPicPr>
+        <p:blipFill>
+          <a:blip r:embed="rId2">
+            <a:extLst>
+              <a:ext uri="{28A0092B-C50C-407E-A947-70E740481C1C}">
+                <a14:useLocalDpi xmlns:a14="http://schemas.microsoft.com/office/drawing/2010/main" val="0"/>
+              </a:ext>
+            </a:extLst>
+          </a:blip>
+          <a:stretch>
+            <a:fillRect/>
+          </a:stretch>
+        </p:blipFill>
+        <p:spPr>
+          <a:xfrm>
+            <a:off x="4632237" y="917576"/>
+            <a:ext cx="7349091" cy="5763557"/>
+          </a:xfrm>
+          <a:prstGeom prst="rect">
+            <a:avLst/>
+          </a:prstGeom>
+        </p:spPr>
+      </p:pic>
+      <p:sp>
+        <p:nvSpPr>
+          <p:cNvPr id="8" name="Subtitle 2">
+            <a:extLst>
+              <a:ext uri="{FF2B5EF4-FFF2-40B4-BE49-F238E27FC236}">
+                <a16:creationId xmlns:a16="http://schemas.microsoft.com/office/drawing/2014/main" id="{8174CB9C-5AF3-CAB8-250D-CA3237A3DF0B}"/>
+              </a:ext>
+            </a:extLst>
+          </p:cNvPr>
+          <p:cNvSpPr txBox="1">
+            <a:spLocks/>
+          </p:cNvSpPr>
+          <p:nvPr/>
+        </p:nvSpPr>
+        <p:spPr>
+          <a:xfrm>
+            <a:off x="349623" y="981635"/>
+            <a:ext cx="4114802" cy="4572000"/>
+          </a:xfrm>
+          <a:prstGeom prst="rect">
+            <a:avLst/>
+          </a:prstGeom>
+        </p:spPr>
+        <p:txBody>
+          <a:bodyPr/>
+          <a:lstStyle>
+            <a:lvl1pPr marL="228600" indent="-228600" algn="l" defTabSz="914400" rtl="0" eaLnBrk="1" latinLnBrk="0" hangingPunct="1">
+              <a:lnSpc>
+                <a:spcPct val="90000"/>
+              </a:lnSpc>
+              <a:spcBef>
+                <a:spcPts val="1000"/>
+              </a:spcBef>
+              <a:buFont typeface="Arial" panose="020B0604020202020204" pitchFamily="34" charset="0"/>
+              <a:buChar char="•"/>
+              <a:defRPr sz="2800" kern="1200">
+                <a:solidFill>
+                  <a:schemeClr val="tx1"/>
+                </a:solidFill>
+                <a:latin typeface="+mn-lt"/>
+                <a:ea typeface="+mn-ea"/>
+                <a:cs typeface="+mn-cs"/>
+              </a:defRPr>
+            </a:lvl1pPr>
+            <a:lvl2pPr marL="685800" indent="-228600" algn="l" defTabSz="914400" rtl="0" eaLnBrk="1" latinLnBrk="0" hangingPunct="1">
+              <a:lnSpc>
+                <a:spcPct val="90000"/>
+              </a:lnSpc>
+              <a:spcBef>
+                <a:spcPts val="500"/>
+              </a:spcBef>
+              <a:buFont typeface="Arial" panose="020B0604020202020204" pitchFamily="34" charset="0"/>
+              <a:buChar char="•"/>
+              <a:defRPr sz="2400" kern="1200">
+                <a:solidFill>
+                  <a:schemeClr val="tx1"/>
+                </a:solidFill>
+                <a:latin typeface="+mn-lt"/>
+                <a:ea typeface="+mn-ea"/>
+                <a:cs typeface="+mn-cs"/>
+              </a:defRPr>
+            </a:lvl2pPr>
+            <a:lvl3pPr marL="1143000" indent="-228600" algn="l" defTabSz="914400" rtl="0" eaLnBrk="1" latinLnBrk="0" hangingPunct="1">
+              <a:lnSpc>
+                <a:spcPct val="90000"/>
+              </a:lnSpc>
+              <a:spcBef>
+                <a:spcPts val="500"/>
+              </a:spcBef>
+              <a:buFont typeface="Arial" panose="020B0604020202020204" pitchFamily="34" charset="0"/>
+              <a:buChar char="•"/>
+              <a:defRPr sz="2000" kern="1200">
+                <a:solidFill>
+                  <a:schemeClr val="tx1"/>
+                </a:solidFill>
+                <a:latin typeface="+mn-lt"/>
+                <a:ea typeface="+mn-ea"/>
+                <a:cs typeface="+mn-cs"/>
+              </a:defRPr>
+            </a:lvl3pPr>
+            <a:lvl4pPr marL="1600200" indent="-228600" algn="l" defTabSz="914400" rtl="0" eaLnBrk="1" latinLnBrk="0" hangingPunct="1">
+              <a:lnSpc>
+                <a:spcPct val="90000"/>
+              </a:lnSpc>
+              <a:spcBef>
+                <a:spcPts val="500"/>
+              </a:spcBef>
+              <a:buFont typeface="Arial" panose="020B0604020202020204" pitchFamily="34" charset="0"/>
+              <a:buChar char="•"/>
+              <a:defRPr sz="1800" kern="1200">
+                <a:solidFill>
+                  <a:schemeClr val="tx1"/>
+                </a:solidFill>
+                <a:latin typeface="+mn-lt"/>
+                <a:ea typeface="+mn-ea"/>
+                <a:cs typeface="+mn-cs"/>
+              </a:defRPr>
+            </a:lvl4pPr>
+            <a:lvl5pPr marL="2057400" indent="-228600" algn="l" defTabSz="914400" rtl="0" eaLnBrk="1" latinLnBrk="0" hangingPunct="1">
+              <a:lnSpc>
+                <a:spcPct val="90000"/>
+              </a:lnSpc>
+              <a:spcBef>
+                <a:spcPts val="500"/>
+              </a:spcBef>
+              <a:buFont typeface="Arial" panose="020B0604020202020204" pitchFamily="34" charset="0"/>
+              <a:buChar char="•"/>
+              <a:defRPr sz="1800" kern="1200">
+                <a:solidFill>
+                  <a:schemeClr val="tx1"/>
+                </a:solidFill>
+                <a:latin typeface="+mn-lt"/>
+                <a:ea typeface="+mn-ea"/>
+                <a:cs typeface="+mn-cs"/>
+              </a:defRPr>
+            </a:lvl5pPr>
+            <a:lvl6pPr marL="2514600" indent="-228600" algn="l" defTabSz="914400" rtl="0" eaLnBrk="1" latinLnBrk="0" hangingPunct="1">
+              <a:lnSpc>
+                <a:spcPct val="90000"/>
+              </a:lnSpc>
+              <a:spcBef>
+                <a:spcPts val="500"/>
+              </a:spcBef>
+              <a:buFont typeface="Arial" panose="020B0604020202020204" pitchFamily="34" charset="0"/>
+              <a:buChar char="•"/>
+              <a:defRPr sz="1800" kern="1200">
+                <a:solidFill>
+                  <a:schemeClr val="tx1"/>
+                </a:solidFill>
+                <a:latin typeface="+mn-lt"/>
+                <a:ea typeface="+mn-ea"/>
+                <a:cs typeface="+mn-cs"/>
+              </a:defRPr>
+            </a:lvl6pPr>
+            <a:lvl7pPr marL="2971800" indent="-228600" algn="l" defTabSz="914400" rtl="0" eaLnBrk="1" latinLnBrk="0" hangingPunct="1">
+              <a:lnSpc>
+                <a:spcPct val="90000"/>
+              </a:lnSpc>
+              <a:spcBef>
+                <a:spcPts val="500"/>
+              </a:spcBef>
+              <a:buFont typeface="Arial" panose="020B0604020202020204" pitchFamily="34" charset="0"/>
+              <a:buChar char="•"/>
+              <a:defRPr sz="1800" kern="1200">
+                <a:solidFill>
+                  <a:schemeClr val="tx1"/>
+                </a:solidFill>
+                <a:latin typeface="+mn-lt"/>
+                <a:ea typeface="+mn-ea"/>
+                <a:cs typeface="+mn-cs"/>
+              </a:defRPr>
+            </a:lvl7pPr>
+            <a:lvl8pPr marL="3429000" indent="-228600" algn="l" defTabSz="914400" rtl="0" eaLnBrk="1" latinLnBrk="0" hangingPunct="1">
+              <a:lnSpc>
+                <a:spcPct val="90000"/>
+              </a:lnSpc>
+              <a:spcBef>
+                <a:spcPts val="500"/>
+              </a:spcBef>
+              <a:buFont typeface="Arial" panose="020B0604020202020204" pitchFamily="34" charset="0"/>
+              <a:buChar char="•"/>
+              <a:defRPr sz="1800" kern="1200">
+                <a:solidFill>
+                  <a:schemeClr val="tx1"/>
+                </a:solidFill>
+                <a:latin typeface="+mn-lt"/>
+                <a:ea typeface="+mn-ea"/>
+                <a:cs typeface="+mn-cs"/>
+              </a:defRPr>
+            </a:lvl8pPr>
+            <a:lvl9pPr marL="3886200" indent="-228600" algn="l" defTabSz="914400" rtl="0" eaLnBrk="1" latinLnBrk="0" hangingPunct="1">
+              <a:lnSpc>
+                <a:spcPct val="90000"/>
+              </a:lnSpc>
+              <a:spcBef>
+                <a:spcPts val="500"/>
+              </a:spcBef>
+              <a:buFont typeface="Arial" panose="020B0604020202020204" pitchFamily="34" charset="0"/>
+              <a:buChar char="•"/>
+              <a:defRPr sz="1800" kern="1200">
+                <a:solidFill>
+                  <a:schemeClr val="tx1"/>
+                </a:solidFill>
+                <a:latin typeface="+mn-lt"/>
+                <a:ea typeface="+mn-ea"/>
+                <a:cs typeface="+mn-cs"/>
+              </a:defRPr>
+            </a:lvl9pPr>
+          </a:lstStyle>
+          <a:p>
+            <a:pPr marL="0" indent="0" algn="just">
+              <a:lnSpc>
+                <a:spcPct val="150000"/>
+              </a:lnSpc>
+              <a:buNone/>
+            </a:pPr>
+            <a:r>
+              <a:rPr lang="en-US" sz="1100" dirty="0">
+                <a:latin typeface="Consolas" panose="020B0609020204030204" pitchFamily="49" charset="0"/>
+              </a:rPr>
+              <a:t>We propose </a:t>
+            </a:r>
+            <a:r>
+              <a:rPr lang="en-US" sz="1100" dirty="0" err="1">
+                <a:latin typeface="Consolas" panose="020B0609020204030204" pitchFamily="49" charset="0"/>
+              </a:rPr>
+              <a:t>EdgeBIS</a:t>
+            </a:r>
+            <a:r>
+              <a:rPr lang="en-US" sz="1100" dirty="0">
+                <a:latin typeface="Consolas" panose="020B0609020204030204" pitchFamily="49" charset="0"/>
+              </a:rPr>
+              <a:t>-U-TCM, a lightweight 1-D U-Net with squeeze-and-excitation (SE) and a temporal memory bottleneck for BIS regression from a 10-s, single-channel EEG (128 Hz). The encoder applies paired 3×13×1 Conv-BN-</a:t>
+            </a:r>
+            <a:r>
+              <a:rPr lang="en-US" sz="1100" dirty="0" err="1">
+                <a:latin typeface="Consolas" panose="020B0609020204030204" pitchFamily="49" charset="0"/>
+              </a:rPr>
+              <a:t>ReLU</a:t>
+            </a:r>
+            <a:r>
+              <a:rPr lang="en-US" sz="1100" dirty="0">
+                <a:latin typeface="Consolas" panose="020B0609020204030204" pitchFamily="49" charset="0"/>
+              </a:rPr>
+              <a:t> layers at three scales (T=1280/640/320) with SE attention, followed by stride-2 temporal </a:t>
+            </a:r>
+            <a:r>
+              <a:rPr lang="en-US" sz="1100" dirty="0" err="1">
+                <a:latin typeface="Consolas" panose="020B0609020204030204" pitchFamily="49" charset="0"/>
+              </a:rPr>
+              <a:t>downsampling</a:t>
+            </a:r>
+            <a:r>
+              <a:rPr lang="en-US" sz="1100" dirty="0">
+                <a:latin typeface="Consolas" panose="020B0609020204030204" pitchFamily="49" charset="0"/>
+              </a:rPr>
+              <a:t>. A bottleneck </a:t>
+            </a:r>
+            <a:r>
+              <a:rPr lang="en-US" sz="1100" dirty="0" err="1">
+                <a:latin typeface="Consolas" panose="020B0609020204030204" pitchFamily="49" charset="0"/>
+              </a:rPr>
+              <a:t>TemporalConvMemory</a:t>
+            </a:r>
+            <a:r>
+              <a:rPr lang="en-US" sz="1100" dirty="0">
+                <a:latin typeface="Consolas" panose="020B0609020204030204" pitchFamily="49" charset="0"/>
+              </a:rPr>
+              <a:t> performs </a:t>
+            </a:r>
+            <a:r>
+              <a:rPr lang="en-US" sz="1100" dirty="0" err="1">
+                <a:latin typeface="Consolas" panose="020B0609020204030204" pitchFamily="49" charset="0"/>
+              </a:rPr>
+              <a:t>depthwise</a:t>
+            </a:r>
+            <a:r>
+              <a:rPr lang="en-US" sz="1100" dirty="0">
+                <a:latin typeface="Consolas" panose="020B0609020204030204" pitchFamily="49" charset="0"/>
+              </a:rPr>
+              <a:t> temporal filtering (𝑘=5k=5) and pointwise channel mixing with a residual skip. The decoder mirrors the encoder with transposed convolutions (𝑘=2,𝑠=2k=2,s=2) plus interpolation, concatenates the corresponding encoder features, and refines them with SE-augmented conv blocks. A global average pooling across time and a linear layer produce a window-level BIS estimate. The network has 0.27 M parameters (~1.08 MB fp32) and runs in ~10 </a:t>
+            </a:r>
+            <a:r>
+              <a:rPr lang="en-US" sz="1100" dirty="0" err="1">
+                <a:latin typeface="Consolas" panose="020B0609020204030204" pitchFamily="49" charset="0"/>
+              </a:rPr>
+              <a:t>ms</a:t>
+            </a:r>
+            <a:r>
+              <a:rPr lang="en-US" sz="1100" dirty="0">
+                <a:latin typeface="Consolas" panose="020B0609020204030204" pitchFamily="49" charset="0"/>
+              </a:rPr>
+              <a:t> per window on CPU, enabling bedside deployment while preserving accuracy through multi-scale temporal features and adaptive channel reweighting.</a:t>
+            </a:r>
+          </a:p>
+        </p:txBody>
+      </p:sp>
+    </p:spTree>
+    <p:extLst>
+      <p:ext uri="{BB962C8B-B14F-4D97-AF65-F5344CB8AC3E}">
+        <p14:creationId xmlns:p14="http://schemas.microsoft.com/office/powerpoint/2010/main" val="1390098416"/>
       </p:ext>
     </p:extLst>
   </p:cSld>
